--- a/docs/pptx/whole/ritu-linsubhr-ratio-hosp6_10pct.pptx
+++ b/docs/pptx/whole/ritu-linsubhr-ratio-hosp6_10pct.pptx
@@ -2443,7 +2443,7 @@
           </p:nvSpPr>
           <p:spPr>
             <a:xfrm>
-              <a:off x="955490" y="2073503"/>
+              <a:off x="957589" y="2073503"/>
               <a:ext cx="0" cy="3649639"/>
             </a:xfrm>
             <a:custGeom>
@@ -2486,7 +2486,7 @@
           </p:nvSpPr>
           <p:spPr>
             <a:xfrm>
-              <a:off x="1892768" y="2073503"/>
+              <a:off x="1893867" y="2073503"/>
               <a:ext cx="0" cy="3649639"/>
             </a:xfrm>
             <a:custGeom>
@@ -2529,7 +2529,7 @@
           </p:nvSpPr>
           <p:spPr>
             <a:xfrm>
-              <a:off x="2830046" y="2073503"/>
+              <a:off x="2830144" y="2073503"/>
               <a:ext cx="0" cy="3649639"/>
             </a:xfrm>
             <a:custGeom>
@@ -2572,7 +2572,7 @@
           </p:nvSpPr>
           <p:spPr>
             <a:xfrm>
-              <a:off x="3767323" y="2073503"/>
+              <a:off x="3766422" y="2073503"/>
               <a:ext cx="0" cy="3649639"/>
             </a:xfrm>
             <a:custGeom>
@@ -2615,7 +2615,7 @@
           </p:nvSpPr>
           <p:spPr>
             <a:xfrm>
-              <a:off x="4704601" y="2073503"/>
+              <a:off x="4702700" y="2073503"/>
               <a:ext cx="0" cy="3649639"/>
             </a:xfrm>
             <a:custGeom>
@@ -2658,7 +2658,7 @@
           </p:nvSpPr>
           <p:spPr>
             <a:xfrm>
-              <a:off x="5641878" y="2073503"/>
+              <a:off x="5638978" y="2073503"/>
               <a:ext cx="0" cy="3649639"/>
             </a:xfrm>
             <a:custGeom>
@@ -2701,7 +2701,7 @@
           </p:nvSpPr>
           <p:spPr>
             <a:xfrm>
-              <a:off x="6579156" y="2073503"/>
+              <a:off x="6575256" y="2073503"/>
               <a:ext cx="0" cy="3649639"/>
             </a:xfrm>
             <a:custGeom>
@@ -2744,7 +2744,7 @@
           </p:nvSpPr>
           <p:spPr>
             <a:xfrm>
-              <a:off x="7516433" y="2073503"/>
+              <a:off x="7511534" y="2073503"/>
               <a:ext cx="0" cy="3649639"/>
             </a:xfrm>
             <a:custGeom>
@@ -2787,7 +2787,7 @@
           </p:nvSpPr>
           <p:spPr>
             <a:xfrm>
-              <a:off x="8453711" y="2073503"/>
+              <a:off x="8447812" y="2073503"/>
               <a:ext cx="0" cy="3649639"/>
             </a:xfrm>
             <a:custGeom>
@@ -3045,7 +3045,7 @@
           </p:nvSpPr>
           <p:spPr>
             <a:xfrm>
-              <a:off x="1424129" y="2073503"/>
+              <a:off x="1425728" y="2073503"/>
               <a:ext cx="0" cy="3649639"/>
             </a:xfrm>
             <a:custGeom>
@@ -3088,7 +3088,7 @@
           </p:nvSpPr>
           <p:spPr>
             <a:xfrm>
-              <a:off x="2361407" y="2073503"/>
+              <a:off x="2362006" y="2073503"/>
               <a:ext cx="0" cy="3649639"/>
             </a:xfrm>
             <a:custGeom>
@@ -3131,7 +3131,7 @@
           </p:nvSpPr>
           <p:spPr>
             <a:xfrm>
-              <a:off x="3298684" y="2073503"/>
+              <a:off x="3298283" y="2073503"/>
               <a:ext cx="0" cy="3649639"/>
             </a:xfrm>
             <a:custGeom>
@@ -3174,7 +3174,7 @@
           </p:nvSpPr>
           <p:spPr>
             <a:xfrm>
-              <a:off x="4235962" y="2073503"/>
+              <a:off x="4234561" y="2073503"/>
               <a:ext cx="0" cy="3649639"/>
             </a:xfrm>
             <a:custGeom>
@@ -3217,7 +3217,7 @@
           </p:nvSpPr>
           <p:spPr>
             <a:xfrm>
-              <a:off x="5173239" y="2073503"/>
+              <a:off x="5170839" y="2073503"/>
               <a:ext cx="0" cy="3649639"/>
             </a:xfrm>
             <a:custGeom>
@@ -3260,7 +3260,7 @@
           </p:nvSpPr>
           <p:spPr>
             <a:xfrm>
-              <a:off x="6110517" y="2073503"/>
+              <a:off x="6107117" y="2073503"/>
               <a:ext cx="0" cy="3649639"/>
             </a:xfrm>
             <a:custGeom>
@@ -3303,7 +3303,7 @@
           </p:nvSpPr>
           <p:spPr>
             <a:xfrm>
-              <a:off x="7047795" y="2073503"/>
+              <a:off x="7043395" y="2073503"/>
               <a:ext cx="0" cy="3649639"/>
             </a:xfrm>
             <a:custGeom>
@@ -3346,7 +3346,7 @@
           </p:nvSpPr>
           <p:spPr>
             <a:xfrm>
-              <a:off x="7985072" y="2073503"/>
+              <a:off x="7979673" y="2073503"/>
               <a:ext cx="0" cy="3649639"/>
             </a:xfrm>
             <a:custGeom>
@@ -3390,398 +3390,398 @@
           <p:spPr>
             <a:xfrm>
               <a:off x="1172049" y="2073503"/>
-              <a:ext cx="7090630" cy="3481853"/>
+              <a:ext cx="7090630" cy="3481877"/>
             </a:xfrm>
             <a:custGeom>
               <a:avLst/>
               <a:pathLst>
-                <a:path w="7090630" h="3481853">
+                <a:path w="7090630" h="3481877">
                   <a:moveTo>
-                    <a:pt x="2210371" y="0"/>
+                    <a:pt x="2212569" y="0"/>
                   </a:moveTo>
                   <a:lnTo>
-                    <a:pt x="2220298" y="55418"/>
-                  </a:lnTo>
-                  <a:lnTo>
-                    <a:pt x="2291920" y="413503"/>
-                  </a:lnTo>
-                  <a:lnTo>
-                    <a:pt x="2363543" y="734188"/>
-                  </a:lnTo>
-                  <a:lnTo>
-                    <a:pt x="2435165" y="1021376"/>
-                  </a:lnTo>
-                  <a:lnTo>
-                    <a:pt x="2506788" y="1278569"/>
-                  </a:lnTo>
-                  <a:lnTo>
-                    <a:pt x="2578410" y="1508897"/>
-                  </a:lnTo>
-                  <a:lnTo>
-                    <a:pt x="2650033" y="1715169"/>
-                  </a:lnTo>
-                  <a:lnTo>
-                    <a:pt x="2721655" y="1899895"/>
-                  </a:lnTo>
-                  <a:lnTo>
-                    <a:pt x="2793278" y="2065327"/>
-                  </a:lnTo>
-                  <a:lnTo>
-                    <a:pt x="2864901" y="2213479"/>
-                  </a:lnTo>
-                  <a:lnTo>
-                    <a:pt x="2936523" y="2346158"/>
-                  </a:lnTo>
-                  <a:lnTo>
-                    <a:pt x="3008146" y="2464978"/>
-                  </a:lnTo>
-                  <a:lnTo>
-                    <a:pt x="3079768" y="2571387"/>
-                  </a:lnTo>
-                  <a:lnTo>
-                    <a:pt x="3151391" y="2641654"/>
-                  </a:lnTo>
-                  <a:lnTo>
-                    <a:pt x="3223013" y="2543100"/>
-                  </a:lnTo>
-                  <a:lnTo>
-                    <a:pt x="3294636" y="2433013"/>
-                  </a:lnTo>
-                  <a:lnTo>
-                    <a:pt x="3366258" y="2310041"/>
-                  </a:lnTo>
-                  <a:lnTo>
-                    <a:pt x="3437881" y="2172677"/>
-                  </a:lnTo>
-                  <a:lnTo>
-                    <a:pt x="3509503" y="2019237"/>
-                  </a:lnTo>
-                  <a:lnTo>
-                    <a:pt x="3581126" y="1847839"/>
-                  </a:lnTo>
-                  <a:lnTo>
-                    <a:pt x="3652748" y="1656382"/>
-                  </a:lnTo>
-                  <a:lnTo>
-                    <a:pt x="3724371" y="1442518"/>
-                  </a:lnTo>
-                  <a:lnTo>
-                    <a:pt x="3795993" y="1203625"/>
-                  </a:lnTo>
-                  <a:lnTo>
-                    <a:pt x="3867616" y="936773"/>
-                  </a:lnTo>
-                  <a:lnTo>
-                    <a:pt x="3939238" y="638690"/>
-                  </a:lnTo>
-                  <a:lnTo>
-                    <a:pt x="4010861" y="305721"/>
-                  </a:lnTo>
-                  <a:lnTo>
-                    <a:pt x="4069733" y="0"/>
+                    <a:pt x="2220298" y="43401"/>
+                  </a:lnTo>
+                  <a:lnTo>
+                    <a:pt x="2291920" y="403487"/>
+                  </a:lnTo>
+                  <a:lnTo>
+                    <a:pt x="2363543" y="725883"/>
+                  </a:lnTo>
+                  <a:lnTo>
+                    <a:pt x="2435165" y="1014536"/>
+                  </a:lnTo>
+                  <a:lnTo>
+                    <a:pt x="2506788" y="1272977"/>
+                  </a:lnTo>
+                  <a:lnTo>
+                    <a:pt x="2578410" y="1504369"/>
+                  </a:lnTo>
+                  <a:lnTo>
+                    <a:pt x="2650033" y="1711541"/>
+                  </a:lnTo>
+                  <a:lnTo>
+                    <a:pt x="2721655" y="1897030"/>
+                  </a:lnTo>
+                  <a:lnTo>
+                    <a:pt x="2793278" y="2063104"/>
+                  </a:lnTo>
+                  <a:lnTo>
+                    <a:pt x="2864901" y="2211796"/>
+                  </a:lnTo>
+                  <a:lnTo>
+                    <a:pt x="2936523" y="2344926"/>
+                  </a:lnTo>
+                  <a:lnTo>
+                    <a:pt x="3008146" y="2464121"/>
+                  </a:lnTo>
+                  <a:lnTo>
+                    <a:pt x="3079768" y="2570840"/>
+                  </a:lnTo>
+                  <a:lnTo>
+                    <a:pt x="3151391" y="2641908"/>
+                  </a:lnTo>
+                  <a:lnTo>
+                    <a:pt x="3223013" y="2542760"/>
+                  </a:lnTo>
+                  <a:lnTo>
+                    <a:pt x="3294636" y="2431933"/>
+                  </a:lnTo>
+                  <a:lnTo>
+                    <a:pt x="3366258" y="2308054"/>
+                  </a:lnTo>
+                  <a:lnTo>
+                    <a:pt x="3437881" y="2169585"/>
+                  </a:lnTo>
+                  <a:lnTo>
+                    <a:pt x="3509503" y="2014807"/>
+                  </a:lnTo>
+                  <a:lnTo>
+                    <a:pt x="3581126" y="1841800"/>
+                  </a:lnTo>
+                  <a:lnTo>
+                    <a:pt x="3652748" y="1648417"/>
+                  </a:lnTo>
+                  <a:lnTo>
+                    <a:pt x="3724371" y="1432258"/>
+                  </a:lnTo>
+                  <a:lnTo>
+                    <a:pt x="3795993" y="1190640"/>
+                  </a:lnTo>
+                  <a:lnTo>
+                    <a:pt x="3867616" y="920565"/>
+                  </a:lnTo>
+                  <a:lnTo>
+                    <a:pt x="3939238" y="618682"/>
+                  </a:lnTo>
+                  <a:lnTo>
+                    <a:pt x="4010861" y="281244"/>
+                  </a:lnTo>
+                  <a:lnTo>
+                    <a:pt x="4064266" y="0"/>
                   </a:lnTo>
                   <a:lnTo>
                     <a:pt x="7090630" y="0"/>
                   </a:lnTo>
                   <a:lnTo>
-                    <a:pt x="7090630" y="3481853"/>
-                  </a:lnTo>
-                  <a:lnTo>
-                    <a:pt x="7019007" y="3481632"/>
-                  </a:lnTo>
-                  <a:lnTo>
-                    <a:pt x="6947385" y="3481386"/>
-                  </a:lnTo>
-                  <a:lnTo>
-                    <a:pt x="6875762" y="3481110"/>
-                  </a:lnTo>
-                  <a:lnTo>
-                    <a:pt x="6804139" y="3480803"/>
-                  </a:lnTo>
-                  <a:lnTo>
-                    <a:pt x="6732517" y="3480460"/>
-                  </a:lnTo>
-                  <a:lnTo>
-                    <a:pt x="6660894" y="3480076"/>
-                  </a:lnTo>
-                  <a:lnTo>
-                    <a:pt x="6589272" y="3479648"/>
-                  </a:lnTo>
-                  <a:lnTo>
-                    <a:pt x="6517649" y="3479170"/>
-                  </a:lnTo>
-                  <a:lnTo>
-                    <a:pt x="6446027" y="3478637"/>
-                  </a:lnTo>
-                  <a:lnTo>
-                    <a:pt x="6374404" y="3478041"/>
-                  </a:lnTo>
-                  <a:lnTo>
-                    <a:pt x="6302782" y="3477375"/>
-                  </a:lnTo>
-                  <a:lnTo>
-                    <a:pt x="6231159" y="3476632"/>
-                  </a:lnTo>
-                  <a:lnTo>
-                    <a:pt x="6159537" y="3475802"/>
-                  </a:lnTo>
-                  <a:lnTo>
-                    <a:pt x="6087914" y="3474876"/>
-                  </a:lnTo>
-                  <a:lnTo>
-                    <a:pt x="6016292" y="3473841"/>
-                  </a:lnTo>
-                  <a:lnTo>
-                    <a:pt x="5944669" y="3472686"/>
-                  </a:lnTo>
-                  <a:lnTo>
-                    <a:pt x="5873047" y="3471396"/>
-                  </a:lnTo>
-                  <a:lnTo>
-                    <a:pt x="5801424" y="3469955"/>
-                  </a:lnTo>
-                  <a:lnTo>
-                    <a:pt x="5729802" y="3468347"/>
-                  </a:lnTo>
-                  <a:lnTo>
-                    <a:pt x="5658179" y="3466551"/>
-                  </a:lnTo>
-                  <a:lnTo>
-                    <a:pt x="5586557" y="3464545"/>
-                  </a:lnTo>
-                  <a:lnTo>
-                    <a:pt x="5514934" y="3462306"/>
-                  </a:lnTo>
-                  <a:lnTo>
-                    <a:pt x="5443311" y="3459805"/>
-                  </a:lnTo>
-                  <a:lnTo>
-                    <a:pt x="5371689" y="3457013"/>
-                  </a:lnTo>
-                  <a:lnTo>
-                    <a:pt x="5300066" y="3453895"/>
-                  </a:lnTo>
-                  <a:lnTo>
-                    <a:pt x="5228444" y="3450413"/>
-                  </a:lnTo>
-                  <a:lnTo>
-                    <a:pt x="5156821" y="3446526"/>
-                  </a:lnTo>
-                  <a:lnTo>
-                    <a:pt x="5085199" y="3442185"/>
-                  </a:lnTo>
-                  <a:lnTo>
-                    <a:pt x="5013576" y="3437337"/>
-                  </a:lnTo>
-                  <a:lnTo>
-                    <a:pt x="4941954" y="3431925"/>
-                  </a:lnTo>
-                  <a:lnTo>
-                    <a:pt x="4870331" y="3425880"/>
-                  </a:lnTo>
-                  <a:lnTo>
-                    <a:pt x="4798709" y="3419131"/>
-                  </a:lnTo>
-                  <a:lnTo>
-                    <a:pt x="4727086" y="3411595"/>
-                  </a:lnTo>
-                  <a:lnTo>
-                    <a:pt x="4655464" y="3403180"/>
-                  </a:lnTo>
-                  <a:lnTo>
-                    <a:pt x="4583841" y="3393784"/>
-                  </a:lnTo>
-                  <a:lnTo>
-                    <a:pt x="4512219" y="3383291"/>
-                  </a:lnTo>
-                  <a:lnTo>
-                    <a:pt x="4440596" y="3371575"/>
-                  </a:lnTo>
-                  <a:lnTo>
-                    <a:pt x="4368974" y="3358493"/>
-                  </a:lnTo>
-                  <a:lnTo>
-                    <a:pt x="4297351" y="3343884"/>
-                  </a:lnTo>
-                  <a:lnTo>
-                    <a:pt x="4225729" y="3327572"/>
-                  </a:lnTo>
-                  <a:lnTo>
-                    <a:pt x="4154106" y="3309357"/>
-                  </a:lnTo>
-                  <a:lnTo>
-                    <a:pt x="4082483" y="3289018"/>
-                  </a:lnTo>
-                  <a:lnTo>
-                    <a:pt x="4010861" y="3266306"/>
-                  </a:lnTo>
-                  <a:lnTo>
-                    <a:pt x="3939238" y="3240946"/>
-                  </a:lnTo>
-                  <a:lnTo>
-                    <a:pt x="3867616" y="3212628"/>
-                  </a:lnTo>
-                  <a:lnTo>
-                    <a:pt x="3795993" y="3181007"/>
-                  </a:lnTo>
-                  <a:lnTo>
-                    <a:pt x="3724371" y="3145698"/>
-                  </a:lnTo>
-                  <a:lnTo>
-                    <a:pt x="3652748" y="3106271"/>
-                  </a:lnTo>
-                  <a:lnTo>
-                    <a:pt x="3581126" y="3062246"/>
-                  </a:lnTo>
-                  <a:lnTo>
-                    <a:pt x="3509503" y="3013086"/>
-                  </a:lnTo>
-                  <a:lnTo>
-                    <a:pt x="3437881" y="2958192"/>
-                  </a:lnTo>
-                  <a:lnTo>
-                    <a:pt x="3366258" y="2896896"/>
-                  </a:lnTo>
-                  <a:lnTo>
-                    <a:pt x="3294636" y="2828452"/>
-                  </a:lnTo>
-                  <a:lnTo>
-                    <a:pt x="3223013" y="2752024"/>
-                  </a:lnTo>
-                  <a:lnTo>
-                    <a:pt x="3151391" y="2666682"/>
-                  </a:lnTo>
-                  <a:lnTo>
-                    <a:pt x="3079768" y="2729882"/>
-                  </a:lnTo>
-                  <a:lnTo>
-                    <a:pt x="3008146" y="2808866"/>
-                  </a:lnTo>
-                  <a:lnTo>
-                    <a:pt x="2936523" y="2879575"/>
-                  </a:lnTo>
-                  <a:lnTo>
-                    <a:pt x="2864901" y="2942875"/>
-                  </a:lnTo>
-                  <a:lnTo>
-                    <a:pt x="2793278" y="2999543"/>
-                  </a:lnTo>
-                  <a:lnTo>
-                    <a:pt x="2721655" y="3050274"/>
-                  </a:lnTo>
-                  <a:lnTo>
-                    <a:pt x="2650033" y="3095690"/>
-                  </a:lnTo>
-                  <a:lnTo>
-                    <a:pt x="2578410" y="3136348"/>
-                  </a:lnTo>
-                  <a:lnTo>
-                    <a:pt x="2506788" y="3172745"/>
-                  </a:lnTo>
-                  <a:lnTo>
-                    <a:pt x="2435165" y="3205330"/>
-                  </a:lnTo>
-                  <a:lnTo>
-                    <a:pt x="2363543" y="3234500"/>
-                  </a:lnTo>
-                  <a:lnTo>
-                    <a:pt x="2291920" y="3260614"/>
-                  </a:lnTo>
-                  <a:lnTo>
-                    <a:pt x="2220298" y="3283992"/>
-                  </a:lnTo>
-                  <a:lnTo>
-                    <a:pt x="2148675" y="3304921"/>
-                  </a:lnTo>
-                  <a:lnTo>
-                    <a:pt x="2077053" y="3323657"/>
-                  </a:lnTo>
-                  <a:lnTo>
-                    <a:pt x="2005430" y="3340430"/>
-                  </a:lnTo>
-                  <a:lnTo>
-                    <a:pt x="1933808" y="3355445"/>
-                  </a:lnTo>
-                  <a:lnTo>
-                    <a:pt x="1862185" y="3368888"/>
-                  </a:lnTo>
-                  <a:lnTo>
-                    <a:pt x="1790563" y="3380922"/>
-                  </a:lnTo>
-                  <a:lnTo>
-                    <a:pt x="1718940" y="3391695"/>
-                  </a:lnTo>
-                  <a:lnTo>
-                    <a:pt x="1647318" y="3401339"/>
-                  </a:lnTo>
-                  <a:lnTo>
-                    <a:pt x="1575695" y="3409973"/>
-                  </a:lnTo>
-                  <a:lnTo>
-                    <a:pt x="1504073" y="3417703"/>
-                  </a:lnTo>
-                  <a:lnTo>
-                    <a:pt x="1432450" y="3424622"/>
-                  </a:lnTo>
-                  <a:lnTo>
-                    <a:pt x="1360827" y="3430817"/>
-                  </a:lnTo>
-                  <a:lnTo>
-                    <a:pt x="1289205" y="3436362"/>
-                  </a:lnTo>
-                  <a:lnTo>
-                    <a:pt x="1217582" y="3441327"/>
-                  </a:lnTo>
-                  <a:lnTo>
-                    <a:pt x="1145960" y="3445771"/>
-                  </a:lnTo>
-                  <a:lnTo>
-                    <a:pt x="1074337" y="3449750"/>
-                  </a:lnTo>
-                  <a:lnTo>
-                    <a:pt x="1002715" y="3453312"/>
-                  </a:lnTo>
-                  <a:lnTo>
-                    <a:pt x="931092" y="3456501"/>
-                  </a:lnTo>
-                  <a:lnTo>
-                    <a:pt x="859470" y="3459355"/>
-                  </a:lnTo>
-                  <a:lnTo>
-                    <a:pt x="787847" y="3461911"/>
-                  </a:lnTo>
-                  <a:lnTo>
-                    <a:pt x="716225" y="3464199"/>
-                  </a:lnTo>
-                  <a:lnTo>
-                    <a:pt x="644602" y="3466247"/>
-                  </a:lnTo>
-                  <a:lnTo>
-                    <a:pt x="572980" y="3468080"/>
-                  </a:lnTo>
-                  <a:lnTo>
-                    <a:pt x="501357" y="3469721"/>
-                  </a:lnTo>
-                  <a:lnTo>
-                    <a:pt x="429735" y="3471191"/>
-                  </a:lnTo>
-                  <a:lnTo>
-                    <a:pt x="358112" y="3472506"/>
-                  </a:lnTo>
-                  <a:lnTo>
-                    <a:pt x="286490" y="3473684"/>
-                  </a:lnTo>
-                  <a:lnTo>
-                    <a:pt x="214867" y="3474738"/>
-                  </a:lnTo>
-                  <a:lnTo>
-                    <a:pt x="143245" y="3475682"/>
-                  </a:lnTo>
-                  <a:lnTo>
-                    <a:pt x="71622" y="3476527"/>
-                  </a:lnTo>
-                  <a:lnTo>
-                    <a:pt x="0" y="3477283"/>
+                    <a:pt x="7090630" y="3481877"/>
+                  </a:lnTo>
+                  <a:lnTo>
+                    <a:pt x="7019007" y="3481659"/>
+                  </a:lnTo>
+                  <a:lnTo>
+                    <a:pt x="6947385" y="3481415"/>
+                  </a:lnTo>
+                  <a:lnTo>
+                    <a:pt x="6875762" y="3481142"/>
+                  </a:lnTo>
+                  <a:lnTo>
+                    <a:pt x="6804139" y="3480838"/>
+                  </a:lnTo>
+                  <a:lnTo>
+                    <a:pt x="6732517" y="3480498"/>
+                  </a:lnTo>
+                  <a:lnTo>
+                    <a:pt x="6660894" y="3480118"/>
+                  </a:lnTo>
+                  <a:lnTo>
+                    <a:pt x="6589272" y="3479694"/>
+                  </a:lnTo>
+                  <a:lnTo>
+                    <a:pt x="6517649" y="3479220"/>
+                  </a:lnTo>
+                  <a:lnTo>
+                    <a:pt x="6446027" y="3478691"/>
+                  </a:lnTo>
+                  <a:lnTo>
+                    <a:pt x="6374404" y="3478100"/>
+                  </a:lnTo>
+                  <a:lnTo>
+                    <a:pt x="6302782" y="3477440"/>
+                  </a:lnTo>
+                  <a:lnTo>
+                    <a:pt x="6231159" y="3476703"/>
+                  </a:lnTo>
+                  <a:lnTo>
+                    <a:pt x="6159537" y="3475880"/>
+                  </a:lnTo>
+                  <a:lnTo>
+                    <a:pt x="6087914" y="3474960"/>
+                  </a:lnTo>
+                  <a:lnTo>
+                    <a:pt x="6016292" y="3473933"/>
+                  </a:lnTo>
+                  <a:lnTo>
+                    <a:pt x="5944669" y="3472786"/>
+                  </a:lnTo>
+                  <a:lnTo>
+                    <a:pt x="5873047" y="3471504"/>
+                  </a:lnTo>
+                  <a:lnTo>
+                    <a:pt x="5801424" y="3470073"/>
+                  </a:lnTo>
+                  <a:lnTo>
+                    <a:pt x="5729802" y="3468475"/>
+                  </a:lnTo>
+                  <a:lnTo>
+                    <a:pt x="5658179" y="3466690"/>
+                  </a:lnTo>
+                  <a:lnTo>
+                    <a:pt x="5586557" y="3464696"/>
+                  </a:lnTo>
+                  <a:lnTo>
+                    <a:pt x="5514934" y="3462469"/>
+                  </a:lnTo>
+                  <a:lnTo>
+                    <a:pt x="5443311" y="3459981"/>
+                  </a:lnTo>
+                  <a:lnTo>
+                    <a:pt x="5371689" y="3457203"/>
+                  </a:lnTo>
+                  <a:lnTo>
+                    <a:pt x="5300066" y="3454100"/>
+                  </a:lnTo>
+                  <a:lnTo>
+                    <a:pt x="5228444" y="3450634"/>
+                  </a:lnTo>
+                  <a:lnTo>
+                    <a:pt x="5156821" y="3446764"/>
+                  </a:lnTo>
+                  <a:lnTo>
+                    <a:pt x="5085199" y="3442440"/>
+                  </a:lnTo>
+                  <a:lnTo>
+                    <a:pt x="5013576" y="3437611"/>
+                  </a:lnTo>
+                  <a:lnTo>
+                    <a:pt x="4941954" y="3432218"/>
+                  </a:lnTo>
+                  <a:lnTo>
+                    <a:pt x="4870331" y="3426195"/>
+                  </a:lnTo>
+                  <a:lnTo>
+                    <a:pt x="4798709" y="3419467"/>
+                  </a:lnTo>
+                  <a:lnTo>
+                    <a:pt x="4727086" y="3411952"/>
+                  </a:lnTo>
+                  <a:lnTo>
+                    <a:pt x="4655464" y="3403559"/>
+                  </a:lnTo>
+                  <a:lnTo>
+                    <a:pt x="4583841" y="3394186"/>
+                  </a:lnTo>
+                  <a:lnTo>
+                    <a:pt x="4512219" y="3383716"/>
+                  </a:lnTo>
+                  <a:lnTo>
+                    <a:pt x="4440596" y="3372022"/>
+                  </a:lnTo>
+                  <a:lnTo>
+                    <a:pt x="4368974" y="3358961"/>
+                  </a:lnTo>
+                  <a:lnTo>
+                    <a:pt x="4297351" y="3344374"/>
+                  </a:lnTo>
+                  <a:lnTo>
+                    <a:pt x="4225729" y="3328081"/>
+                  </a:lnTo>
+                  <a:lnTo>
+                    <a:pt x="4154106" y="3309884"/>
+                  </a:lnTo>
+                  <a:lnTo>
+                    <a:pt x="4082483" y="3289559"/>
+                  </a:lnTo>
+                  <a:lnTo>
+                    <a:pt x="4010861" y="3266858"/>
+                  </a:lnTo>
+                  <a:lnTo>
+                    <a:pt x="3939238" y="3241504"/>
+                  </a:lnTo>
+                  <a:lnTo>
+                    <a:pt x="3867616" y="3213186"/>
+                  </a:lnTo>
+                  <a:lnTo>
+                    <a:pt x="3795993" y="3181557"/>
+                  </a:lnTo>
+                  <a:lnTo>
+                    <a:pt x="3724371" y="3146231"/>
+                  </a:lnTo>
+                  <a:lnTo>
+                    <a:pt x="3652748" y="3106775"/>
+                  </a:lnTo>
+                  <a:lnTo>
+                    <a:pt x="3581126" y="3062706"/>
+                  </a:lnTo>
+                  <a:lnTo>
+                    <a:pt x="3509503" y="3013486"/>
+                  </a:lnTo>
+                  <a:lnTo>
+                    <a:pt x="3437881" y="2958512"/>
+                  </a:lnTo>
+                  <a:lnTo>
+                    <a:pt x="3366258" y="2897112"/>
+                  </a:lnTo>
+                  <a:lnTo>
+                    <a:pt x="3294636" y="2828534"/>
+                  </a:lnTo>
+                  <a:lnTo>
+                    <a:pt x="3223013" y="2751939"/>
+                  </a:lnTo>
+                  <a:lnTo>
+                    <a:pt x="3151391" y="2666390"/>
+                  </a:lnTo>
+                  <a:lnTo>
+                    <a:pt x="3079768" y="2730610"/>
+                  </a:lnTo>
+                  <a:lnTo>
+                    <a:pt x="3008146" y="2809966"/>
+                  </a:lnTo>
+                  <a:lnTo>
+                    <a:pt x="2936523" y="2880960"/>
+                  </a:lnTo>
+                  <a:lnTo>
+                    <a:pt x="2864901" y="2944474"/>
+                  </a:lnTo>
+                  <a:lnTo>
+                    <a:pt x="2793278" y="3001296"/>
+                  </a:lnTo>
+                  <a:lnTo>
+                    <a:pt x="2721655" y="3052130"/>
+                  </a:lnTo>
+                  <a:lnTo>
+                    <a:pt x="2650033" y="3097608"/>
+                  </a:lnTo>
+                  <a:lnTo>
+                    <a:pt x="2578410" y="3138294"/>
+                  </a:lnTo>
+                  <a:lnTo>
+                    <a:pt x="2506788" y="3174694"/>
+                  </a:lnTo>
+                  <a:lnTo>
+                    <a:pt x="2435165" y="3207258"/>
+                  </a:lnTo>
+                  <a:lnTo>
+                    <a:pt x="2363543" y="3236390"/>
+                  </a:lnTo>
+                  <a:lnTo>
+                    <a:pt x="2291920" y="3262454"/>
+                  </a:lnTo>
+                  <a:lnTo>
+                    <a:pt x="2220298" y="3285770"/>
+                  </a:lnTo>
+                  <a:lnTo>
+                    <a:pt x="2148675" y="3306631"/>
+                  </a:lnTo>
+                  <a:lnTo>
+                    <a:pt x="2077053" y="3325293"/>
+                  </a:lnTo>
+                  <a:lnTo>
+                    <a:pt x="2005430" y="3341989"/>
+                  </a:lnTo>
+                  <a:lnTo>
+                    <a:pt x="1933808" y="3356925"/>
+                  </a:lnTo>
+                  <a:lnTo>
+                    <a:pt x="1862185" y="3370288"/>
+                  </a:lnTo>
+                  <a:lnTo>
+                    <a:pt x="1790563" y="3382243"/>
+                  </a:lnTo>
+                  <a:lnTo>
+                    <a:pt x="1718940" y="3392938"/>
+                  </a:lnTo>
+                  <a:lnTo>
+                    <a:pt x="1647318" y="3402506"/>
+                  </a:lnTo>
+                  <a:lnTo>
+                    <a:pt x="1575695" y="3411066"/>
+                  </a:lnTo>
+                  <a:lnTo>
+                    <a:pt x="1504073" y="3418724"/>
+                  </a:lnTo>
+                  <a:lnTo>
+                    <a:pt x="1432450" y="3425575"/>
+                  </a:lnTo>
+                  <a:lnTo>
+                    <a:pt x="1360827" y="3431705"/>
+                  </a:lnTo>
+                  <a:lnTo>
+                    <a:pt x="1289205" y="3437188"/>
+                  </a:lnTo>
+                  <a:lnTo>
+                    <a:pt x="1217582" y="3442094"/>
+                  </a:lnTo>
+                  <a:lnTo>
+                    <a:pt x="1145960" y="3446483"/>
+                  </a:lnTo>
+                  <a:lnTo>
+                    <a:pt x="1074337" y="3450409"/>
+                  </a:lnTo>
+                  <a:lnTo>
+                    <a:pt x="1002715" y="3453922"/>
+                  </a:lnTo>
+                  <a:lnTo>
+                    <a:pt x="931092" y="3457064"/>
+                  </a:lnTo>
+                  <a:lnTo>
+                    <a:pt x="859470" y="3459876"/>
+                  </a:lnTo>
+                  <a:lnTo>
+                    <a:pt x="787847" y="3462391"/>
+                  </a:lnTo>
+                  <a:lnTo>
+                    <a:pt x="716225" y="3464641"/>
+                  </a:lnTo>
+                  <a:lnTo>
+                    <a:pt x="644602" y="3466654"/>
+                  </a:lnTo>
+                  <a:lnTo>
+                    <a:pt x="572980" y="3468455"/>
+                  </a:lnTo>
+                  <a:lnTo>
+                    <a:pt x="501357" y="3470066"/>
+                  </a:lnTo>
+                  <a:lnTo>
+                    <a:pt x="429735" y="3471508"/>
+                  </a:lnTo>
+                  <a:lnTo>
+                    <a:pt x="358112" y="3472797"/>
+                  </a:lnTo>
+                  <a:lnTo>
+                    <a:pt x="286490" y="3473951"/>
+                  </a:lnTo>
+                  <a:lnTo>
+                    <a:pt x="214867" y="3474983"/>
+                  </a:lnTo>
+                  <a:lnTo>
+                    <a:pt x="143245" y="3475906"/>
+                  </a:lnTo>
+                  <a:lnTo>
+                    <a:pt x="71622" y="3476733"/>
+                  </a:lnTo>
+                  <a:lnTo>
+                    <a:pt x="0" y="3477472"/>
                   </a:lnTo>
                   <a:lnTo>
                     <a:pt x="0" y="0"/>
@@ -3810,96 +3810,96 @@
           </p:nvSpPr>
           <p:spPr>
             <a:xfrm>
-              <a:off x="3382420" y="2073503"/>
-              <a:ext cx="1859361" cy="2641654"/>
+              <a:off x="3384618" y="2073503"/>
+              <a:ext cx="1851697" cy="2641908"/>
             </a:xfrm>
             <a:custGeom>
               <a:avLst/>
               <a:pathLst>
-                <a:path w="1859361" h="2641654">
+                <a:path w="1851697" h="2641908">
                   <a:moveTo>
                     <a:pt x="0" y="0"/>
                   </a:moveTo>
                   <a:lnTo>
-                    <a:pt x="9926" y="55418"/>
-                  </a:lnTo>
-                  <a:lnTo>
-                    <a:pt x="81549" y="413503"/>
-                  </a:lnTo>
-                  <a:lnTo>
-                    <a:pt x="153171" y="734188"/>
-                  </a:lnTo>
-                  <a:lnTo>
-                    <a:pt x="224794" y="1021376"/>
-                  </a:lnTo>
-                  <a:lnTo>
-                    <a:pt x="296416" y="1278569"/>
-                  </a:lnTo>
-                  <a:lnTo>
-                    <a:pt x="368039" y="1508897"/>
-                  </a:lnTo>
-                  <a:lnTo>
-                    <a:pt x="439661" y="1715169"/>
-                  </a:lnTo>
-                  <a:lnTo>
-                    <a:pt x="511284" y="1899895"/>
-                  </a:lnTo>
-                  <a:lnTo>
-                    <a:pt x="582906" y="2065327"/>
-                  </a:lnTo>
-                  <a:lnTo>
-                    <a:pt x="654529" y="2213479"/>
-                  </a:lnTo>
-                  <a:lnTo>
-                    <a:pt x="726151" y="2346158"/>
-                  </a:lnTo>
-                  <a:lnTo>
-                    <a:pt x="797774" y="2464978"/>
-                  </a:lnTo>
-                  <a:lnTo>
-                    <a:pt x="869397" y="2571387"/>
-                  </a:lnTo>
-                  <a:lnTo>
-                    <a:pt x="941019" y="2641654"/>
-                  </a:lnTo>
-                  <a:lnTo>
-                    <a:pt x="1012642" y="2543100"/>
-                  </a:lnTo>
-                  <a:lnTo>
-                    <a:pt x="1084264" y="2433013"/>
-                  </a:lnTo>
-                  <a:lnTo>
-                    <a:pt x="1155887" y="2310041"/>
-                  </a:lnTo>
-                  <a:lnTo>
-                    <a:pt x="1227509" y="2172677"/>
-                  </a:lnTo>
-                  <a:lnTo>
-                    <a:pt x="1299132" y="2019237"/>
-                  </a:lnTo>
-                  <a:lnTo>
-                    <a:pt x="1370754" y="1847839"/>
-                  </a:lnTo>
-                  <a:lnTo>
-                    <a:pt x="1442377" y="1656382"/>
-                  </a:lnTo>
-                  <a:lnTo>
-                    <a:pt x="1513999" y="1442518"/>
-                  </a:lnTo>
-                  <a:lnTo>
-                    <a:pt x="1585622" y="1203625"/>
-                  </a:lnTo>
-                  <a:lnTo>
-                    <a:pt x="1657244" y="936773"/>
-                  </a:lnTo>
-                  <a:lnTo>
-                    <a:pt x="1728867" y="638690"/>
-                  </a:lnTo>
-                  <a:lnTo>
-                    <a:pt x="1800489" y="305721"/>
-                  </a:lnTo>
-                  <a:lnTo>
-                    <a:pt x="1859361" y="0"/>
+                    <a:pt x="7729" y="43401"/>
+                  </a:lnTo>
+                  <a:lnTo>
+                    <a:pt x="79351" y="403487"/>
+                  </a:lnTo>
+                  <a:lnTo>
+                    <a:pt x="150974" y="725883"/>
+                  </a:lnTo>
+                  <a:lnTo>
+                    <a:pt x="222596" y="1014536"/>
+                  </a:lnTo>
+                  <a:lnTo>
+                    <a:pt x="294219" y="1272977"/>
+                  </a:lnTo>
+                  <a:lnTo>
+                    <a:pt x="365841" y="1504369"/>
+                  </a:lnTo>
+                  <a:lnTo>
+                    <a:pt x="437464" y="1711541"/>
+                  </a:lnTo>
+                  <a:lnTo>
+                    <a:pt x="509086" y="1897030"/>
+                  </a:lnTo>
+                  <a:lnTo>
+                    <a:pt x="580709" y="2063104"/>
+                  </a:lnTo>
+                  <a:lnTo>
+                    <a:pt x="652331" y="2211796"/>
+                  </a:lnTo>
+                  <a:lnTo>
+                    <a:pt x="723954" y="2344926"/>
+                  </a:lnTo>
+                  <a:lnTo>
+                    <a:pt x="795577" y="2464121"/>
+                  </a:lnTo>
+                  <a:lnTo>
+                    <a:pt x="867199" y="2570840"/>
+                  </a:lnTo>
+                  <a:lnTo>
+                    <a:pt x="938822" y="2641908"/>
+                  </a:lnTo>
+                  <a:lnTo>
+                    <a:pt x="1010444" y="2542760"/>
+                  </a:lnTo>
+                  <a:lnTo>
+                    <a:pt x="1082067" y="2431933"/>
+                  </a:lnTo>
+                  <a:lnTo>
+                    <a:pt x="1153689" y="2308054"/>
+                  </a:lnTo>
+                  <a:lnTo>
+                    <a:pt x="1225312" y="2169585"/>
+                  </a:lnTo>
+                  <a:lnTo>
+                    <a:pt x="1296934" y="2014807"/>
+                  </a:lnTo>
+                  <a:lnTo>
+                    <a:pt x="1368557" y="1841800"/>
+                  </a:lnTo>
+                  <a:lnTo>
+                    <a:pt x="1440179" y="1648417"/>
+                  </a:lnTo>
+                  <a:lnTo>
+                    <a:pt x="1511802" y="1432258"/>
+                  </a:lnTo>
+                  <a:lnTo>
+                    <a:pt x="1583424" y="1190640"/>
+                  </a:lnTo>
+                  <a:lnTo>
+                    <a:pt x="1655047" y="920565"/>
+                  </a:lnTo>
+                  <a:lnTo>
+                    <a:pt x="1726669" y="618682"/>
+                  </a:lnTo>
+                  <a:lnTo>
+                    <a:pt x="1798292" y="281244"/>
+                  </a:lnTo>
+                  <a:lnTo>
+                    <a:pt x="1851697" y="0"/>
                   </a:lnTo>
                 </a:path>
               </a:pathLst>
@@ -3919,312 +3919,312 @@
           </p:nvSpPr>
           <p:spPr>
             <a:xfrm>
-              <a:off x="1172049" y="4740185"/>
-              <a:ext cx="7090630" cy="815170"/>
+              <a:off x="1172049" y="4739893"/>
+              <a:ext cx="7090630" cy="815487"/>
             </a:xfrm>
             <a:custGeom>
               <a:avLst/>
               <a:pathLst>
-                <a:path w="7090630" h="815170">
+                <a:path w="7090630" h="815487">
                   <a:moveTo>
-                    <a:pt x="7090630" y="815170"/>
+                    <a:pt x="7090630" y="815487"/>
                   </a:moveTo>
                   <a:lnTo>
-                    <a:pt x="7019007" y="814950"/>
-                  </a:lnTo>
-                  <a:lnTo>
-                    <a:pt x="6947385" y="814703"/>
-                  </a:lnTo>
-                  <a:lnTo>
-                    <a:pt x="6875762" y="814428"/>
-                  </a:lnTo>
-                  <a:lnTo>
-                    <a:pt x="6804139" y="814120"/>
-                  </a:lnTo>
-                  <a:lnTo>
-                    <a:pt x="6732517" y="813777"/>
-                  </a:lnTo>
-                  <a:lnTo>
-                    <a:pt x="6660894" y="813394"/>
-                  </a:lnTo>
-                  <a:lnTo>
-                    <a:pt x="6589272" y="812966"/>
-                  </a:lnTo>
-                  <a:lnTo>
-                    <a:pt x="6517649" y="812488"/>
-                  </a:lnTo>
-                  <a:lnTo>
-                    <a:pt x="6446027" y="811954"/>
-                  </a:lnTo>
-                  <a:lnTo>
-                    <a:pt x="6374404" y="811358"/>
-                  </a:lnTo>
-                  <a:lnTo>
-                    <a:pt x="6302782" y="810692"/>
-                  </a:lnTo>
-                  <a:lnTo>
-                    <a:pt x="6231159" y="809949"/>
-                  </a:lnTo>
-                  <a:lnTo>
-                    <a:pt x="6159537" y="809120"/>
-                  </a:lnTo>
-                  <a:lnTo>
-                    <a:pt x="6087914" y="808193"/>
-                  </a:lnTo>
-                  <a:lnTo>
-                    <a:pt x="6016292" y="807158"/>
-                  </a:lnTo>
-                  <a:lnTo>
-                    <a:pt x="5944669" y="806003"/>
-                  </a:lnTo>
-                  <a:lnTo>
-                    <a:pt x="5873047" y="804713"/>
-                  </a:lnTo>
-                  <a:lnTo>
-                    <a:pt x="5801424" y="803273"/>
-                  </a:lnTo>
-                  <a:lnTo>
-                    <a:pt x="5729802" y="801664"/>
-                  </a:lnTo>
-                  <a:lnTo>
-                    <a:pt x="5658179" y="799868"/>
-                  </a:lnTo>
-                  <a:lnTo>
-                    <a:pt x="5586557" y="797863"/>
-                  </a:lnTo>
-                  <a:lnTo>
-                    <a:pt x="5514934" y="795623"/>
-                  </a:lnTo>
-                  <a:lnTo>
-                    <a:pt x="5443311" y="793123"/>
-                  </a:lnTo>
-                  <a:lnTo>
-                    <a:pt x="5371689" y="790330"/>
-                  </a:lnTo>
-                  <a:lnTo>
-                    <a:pt x="5300066" y="787212"/>
-                  </a:lnTo>
-                  <a:lnTo>
-                    <a:pt x="5228444" y="783731"/>
-                  </a:lnTo>
-                  <a:lnTo>
-                    <a:pt x="5156821" y="779843"/>
-                  </a:lnTo>
-                  <a:lnTo>
-                    <a:pt x="5085199" y="775502"/>
-                  </a:lnTo>
-                  <a:lnTo>
-                    <a:pt x="5013576" y="770655"/>
-                  </a:lnTo>
-                  <a:lnTo>
-                    <a:pt x="4941954" y="765242"/>
-                  </a:lnTo>
-                  <a:lnTo>
-                    <a:pt x="4870331" y="759198"/>
-                  </a:lnTo>
-                  <a:lnTo>
-                    <a:pt x="4798709" y="752449"/>
-                  </a:lnTo>
-                  <a:lnTo>
-                    <a:pt x="4727086" y="744913"/>
-                  </a:lnTo>
-                  <a:lnTo>
-                    <a:pt x="4655464" y="736498"/>
-                  </a:lnTo>
-                  <a:lnTo>
-                    <a:pt x="4583841" y="727101"/>
-                  </a:lnTo>
-                  <a:lnTo>
-                    <a:pt x="4512219" y="716609"/>
-                  </a:lnTo>
-                  <a:lnTo>
-                    <a:pt x="4440596" y="704893"/>
-                  </a:lnTo>
-                  <a:lnTo>
-                    <a:pt x="4368974" y="691810"/>
-                  </a:lnTo>
-                  <a:lnTo>
-                    <a:pt x="4297351" y="677201"/>
-                  </a:lnTo>
-                  <a:lnTo>
-                    <a:pt x="4225729" y="660889"/>
-                  </a:lnTo>
-                  <a:lnTo>
-                    <a:pt x="4154106" y="642674"/>
-                  </a:lnTo>
-                  <a:lnTo>
-                    <a:pt x="4082483" y="622335"/>
-                  </a:lnTo>
-                  <a:lnTo>
-                    <a:pt x="4010861" y="599624"/>
-                  </a:lnTo>
-                  <a:lnTo>
-                    <a:pt x="3939238" y="574263"/>
-                  </a:lnTo>
-                  <a:lnTo>
-                    <a:pt x="3867616" y="545945"/>
-                  </a:lnTo>
-                  <a:lnTo>
-                    <a:pt x="3795993" y="514324"/>
-                  </a:lnTo>
-                  <a:lnTo>
-                    <a:pt x="3724371" y="479016"/>
-                  </a:lnTo>
-                  <a:lnTo>
-                    <a:pt x="3652748" y="439589"/>
-                  </a:lnTo>
-                  <a:lnTo>
-                    <a:pt x="3581126" y="395563"/>
-                  </a:lnTo>
-                  <a:lnTo>
-                    <a:pt x="3509503" y="346403"/>
-                  </a:lnTo>
-                  <a:lnTo>
-                    <a:pt x="3437881" y="291510"/>
-                  </a:lnTo>
-                  <a:lnTo>
-                    <a:pt x="3366258" y="230214"/>
-                  </a:lnTo>
-                  <a:lnTo>
-                    <a:pt x="3294636" y="161769"/>
-                  </a:lnTo>
-                  <a:lnTo>
-                    <a:pt x="3223013" y="85341"/>
+                    <a:pt x="7019007" y="815268"/>
+                  </a:lnTo>
+                  <a:lnTo>
+                    <a:pt x="6947385" y="815024"/>
+                  </a:lnTo>
+                  <a:lnTo>
+                    <a:pt x="6875762" y="814752"/>
+                  </a:lnTo>
+                  <a:lnTo>
+                    <a:pt x="6804139" y="814447"/>
+                  </a:lnTo>
+                  <a:lnTo>
+                    <a:pt x="6732517" y="814107"/>
+                  </a:lnTo>
+                  <a:lnTo>
+                    <a:pt x="6660894" y="813728"/>
+                  </a:lnTo>
+                  <a:lnTo>
+                    <a:pt x="6589272" y="813303"/>
+                  </a:lnTo>
+                  <a:lnTo>
+                    <a:pt x="6517649" y="812830"/>
+                  </a:lnTo>
+                  <a:lnTo>
+                    <a:pt x="6446027" y="812301"/>
+                  </a:lnTo>
+                  <a:lnTo>
+                    <a:pt x="6374404" y="811710"/>
+                  </a:lnTo>
+                  <a:lnTo>
+                    <a:pt x="6302782" y="811050"/>
+                  </a:lnTo>
+                  <a:lnTo>
+                    <a:pt x="6231159" y="810312"/>
+                  </a:lnTo>
+                  <a:lnTo>
+                    <a:pt x="6159537" y="809489"/>
+                  </a:lnTo>
+                  <a:lnTo>
+                    <a:pt x="6087914" y="808569"/>
+                  </a:lnTo>
+                  <a:lnTo>
+                    <a:pt x="6016292" y="807542"/>
+                  </a:lnTo>
+                  <a:lnTo>
+                    <a:pt x="5944669" y="806395"/>
+                  </a:lnTo>
+                  <a:lnTo>
+                    <a:pt x="5873047" y="805114"/>
+                  </a:lnTo>
+                  <a:lnTo>
+                    <a:pt x="5801424" y="803683"/>
+                  </a:lnTo>
+                  <a:lnTo>
+                    <a:pt x="5729802" y="802084"/>
+                  </a:lnTo>
+                  <a:lnTo>
+                    <a:pt x="5658179" y="800299"/>
+                  </a:lnTo>
+                  <a:lnTo>
+                    <a:pt x="5586557" y="798305"/>
+                  </a:lnTo>
+                  <a:lnTo>
+                    <a:pt x="5514934" y="796078"/>
+                  </a:lnTo>
+                  <a:lnTo>
+                    <a:pt x="5443311" y="793591"/>
+                  </a:lnTo>
+                  <a:lnTo>
+                    <a:pt x="5371689" y="790812"/>
+                  </a:lnTo>
+                  <a:lnTo>
+                    <a:pt x="5300066" y="787709"/>
+                  </a:lnTo>
+                  <a:lnTo>
+                    <a:pt x="5228444" y="784244"/>
+                  </a:lnTo>
+                  <a:lnTo>
+                    <a:pt x="5156821" y="780373"/>
+                  </a:lnTo>
+                  <a:lnTo>
+                    <a:pt x="5085199" y="776050"/>
+                  </a:lnTo>
+                  <a:lnTo>
+                    <a:pt x="5013576" y="771221"/>
+                  </a:lnTo>
+                  <a:lnTo>
+                    <a:pt x="4941954" y="765828"/>
+                  </a:lnTo>
+                  <a:lnTo>
+                    <a:pt x="4870331" y="759804"/>
+                  </a:lnTo>
+                  <a:lnTo>
+                    <a:pt x="4798709" y="753076"/>
+                  </a:lnTo>
+                  <a:lnTo>
+                    <a:pt x="4727086" y="745562"/>
+                  </a:lnTo>
+                  <a:lnTo>
+                    <a:pt x="4655464" y="737169"/>
+                  </a:lnTo>
+                  <a:lnTo>
+                    <a:pt x="4583841" y="727795"/>
+                  </a:lnTo>
+                  <a:lnTo>
+                    <a:pt x="4512219" y="717325"/>
+                  </a:lnTo>
+                  <a:lnTo>
+                    <a:pt x="4440596" y="705632"/>
+                  </a:lnTo>
+                  <a:lnTo>
+                    <a:pt x="4368974" y="692571"/>
+                  </a:lnTo>
+                  <a:lnTo>
+                    <a:pt x="4297351" y="677983"/>
+                  </a:lnTo>
+                  <a:lnTo>
+                    <a:pt x="4225729" y="661691"/>
+                  </a:lnTo>
+                  <a:lnTo>
+                    <a:pt x="4154106" y="643493"/>
+                  </a:lnTo>
+                  <a:lnTo>
+                    <a:pt x="4082483" y="623168"/>
+                  </a:lnTo>
+                  <a:lnTo>
+                    <a:pt x="4010861" y="600468"/>
+                  </a:lnTo>
+                  <a:lnTo>
+                    <a:pt x="3939238" y="575113"/>
+                  </a:lnTo>
+                  <a:lnTo>
+                    <a:pt x="3867616" y="546795"/>
+                  </a:lnTo>
+                  <a:lnTo>
+                    <a:pt x="3795993" y="515166"/>
+                  </a:lnTo>
+                  <a:lnTo>
+                    <a:pt x="3724371" y="479840"/>
+                  </a:lnTo>
+                  <a:lnTo>
+                    <a:pt x="3652748" y="440384"/>
+                  </a:lnTo>
+                  <a:lnTo>
+                    <a:pt x="3581126" y="396316"/>
+                  </a:lnTo>
+                  <a:lnTo>
+                    <a:pt x="3509503" y="347096"/>
+                  </a:lnTo>
+                  <a:lnTo>
+                    <a:pt x="3437881" y="292122"/>
+                  </a:lnTo>
+                  <a:lnTo>
+                    <a:pt x="3366258" y="230722"/>
+                  </a:lnTo>
+                  <a:lnTo>
+                    <a:pt x="3294636" y="162143"/>
+                  </a:lnTo>
+                  <a:lnTo>
+                    <a:pt x="3223013" y="85548"/>
                   </a:lnTo>
                   <a:lnTo>
                     <a:pt x="3151391" y="0"/>
                   </a:lnTo>
                   <a:lnTo>
-                    <a:pt x="3079768" y="63199"/>
-                  </a:lnTo>
-                  <a:lnTo>
-                    <a:pt x="3008146" y="142183"/>
-                  </a:lnTo>
-                  <a:lnTo>
-                    <a:pt x="2936523" y="212892"/>
-                  </a:lnTo>
-                  <a:lnTo>
-                    <a:pt x="2864901" y="276192"/>
-                  </a:lnTo>
-                  <a:lnTo>
-                    <a:pt x="2793278" y="332861"/>
-                  </a:lnTo>
-                  <a:lnTo>
-                    <a:pt x="2721655" y="383592"/>
-                  </a:lnTo>
-                  <a:lnTo>
-                    <a:pt x="2650033" y="429008"/>
-                  </a:lnTo>
-                  <a:lnTo>
-                    <a:pt x="2578410" y="469665"/>
-                  </a:lnTo>
-                  <a:lnTo>
-                    <a:pt x="2506788" y="506063"/>
-                  </a:lnTo>
-                  <a:lnTo>
-                    <a:pt x="2435165" y="538647"/>
-                  </a:lnTo>
-                  <a:lnTo>
-                    <a:pt x="2363543" y="567817"/>
-                  </a:lnTo>
-                  <a:lnTo>
-                    <a:pt x="2291920" y="593931"/>
-                  </a:lnTo>
-                  <a:lnTo>
-                    <a:pt x="2220298" y="617310"/>
-                  </a:lnTo>
-                  <a:lnTo>
-                    <a:pt x="2148675" y="638238"/>
-                  </a:lnTo>
-                  <a:lnTo>
-                    <a:pt x="2077053" y="656974"/>
-                  </a:lnTo>
-                  <a:lnTo>
-                    <a:pt x="2005430" y="673747"/>
-                  </a:lnTo>
-                  <a:lnTo>
-                    <a:pt x="1933808" y="688763"/>
-                  </a:lnTo>
-                  <a:lnTo>
-                    <a:pt x="1862185" y="702205"/>
-                  </a:lnTo>
-                  <a:lnTo>
-                    <a:pt x="1790563" y="714239"/>
-                  </a:lnTo>
-                  <a:lnTo>
-                    <a:pt x="1718940" y="725012"/>
-                  </a:lnTo>
-                  <a:lnTo>
-                    <a:pt x="1647318" y="734657"/>
-                  </a:lnTo>
-                  <a:lnTo>
-                    <a:pt x="1575695" y="743291"/>
-                  </a:lnTo>
-                  <a:lnTo>
-                    <a:pt x="1504073" y="751020"/>
-                  </a:lnTo>
-                  <a:lnTo>
-                    <a:pt x="1432450" y="757940"/>
-                  </a:lnTo>
-                  <a:lnTo>
-                    <a:pt x="1360827" y="764134"/>
-                  </a:lnTo>
-                  <a:lnTo>
-                    <a:pt x="1289205" y="769680"/>
-                  </a:lnTo>
-                  <a:lnTo>
-                    <a:pt x="1217582" y="774644"/>
-                  </a:lnTo>
-                  <a:lnTo>
-                    <a:pt x="1145960" y="779089"/>
-                  </a:lnTo>
-                  <a:lnTo>
-                    <a:pt x="1074337" y="783067"/>
-                  </a:lnTo>
-                  <a:lnTo>
-                    <a:pt x="1002715" y="786629"/>
-                  </a:lnTo>
-                  <a:lnTo>
-                    <a:pt x="931092" y="789818"/>
-                  </a:lnTo>
-                  <a:lnTo>
-                    <a:pt x="859470" y="792673"/>
-                  </a:lnTo>
-                  <a:lnTo>
-                    <a:pt x="787847" y="795228"/>
-                  </a:lnTo>
-                  <a:lnTo>
-                    <a:pt x="716225" y="797516"/>
-                  </a:lnTo>
-                  <a:lnTo>
-                    <a:pt x="644602" y="799564"/>
-                  </a:lnTo>
-                  <a:lnTo>
-                    <a:pt x="572980" y="801397"/>
-                  </a:lnTo>
-                  <a:lnTo>
-                    <a:pt x="501357" y="803039"/>
-                  </a:lnTo>
-                  <a:lnTo>
-                    <a:pt x="429735" y="804508"/>
-                  </a:lnTo>
-                  <a:lnTo>
-                    <a:pt x="358112" y="805824"/>
-                  </a:lnTo>
-                  <a:lnTo>
-                    <a:pt x="286490" y="807001"/>
-                  </a:lnTo>
-                  <a:lnTo>
-                    <a:pt x="214867" y="808056"/>
-                  </a:lnTo>
-                  <a:lnTo>
-                    <a:pt x="143245" y="808999"/>
-                  </a:lnTo>
-                  <a:lnTo>
-                    <a:pt x="71622" y="809844"/>
-                  </a:lnTo>
-                  <a:lnTo>
-                    <a:pt x="0" y="810601"/>
+                    <a:pt x="3079768" y="64220"/>
+                  </a:lnTo>
+                  <a:lnTo>
+                    <a:pt x="3008146" y="143575"/>
+                  </a:lnTo>
+                  <a:lnTo>
+                    <a:pt x="2936523" y="214570"/>
+                  </a:lnTo>
+                  <a:lnTo>
+                    <a:pt x="2864901" y="278083"/>
+                  </a:lnTo>
+                  <a:lnTo>
+                    <a:pt x="2793278" y="334905"/>
+                  </a:lnTo>
+                  <a:lnTo>
+                    <a:pt x="2721655" y="385739"/>
+                  </a:lnTo>
+                  <a:lnTo>
+                    <a:pt x="2650033" y="431217"/>
+                  </a:lnTo>
+                  <a:lnTo>
+                    <a:pt x="2578410" y="471904"/>
+                  </a:lnTo>
+                  <a:lnTo>
+                    <a:pt x="2506788" y="508303"/>
+                  </a:lnTo>
+                  <a:lnTo>
+                    <a:pt x="2435165" y="540867"/>
+                  </a:lnTo>
+                  <a:lnTo>
+                    <a:pt x="2363543" y="570000"/>
+                  </a:lnTo>
+                  <a:lnTo>
+                    <a:pt x="2291920" y="596063"/>
+                  </a:lnTo>
+                  <a:lnTo>
+                    <a:pt x="2220298" y="619380"/>
+                  </a:lnTo>
+                  <a:lnTo>
+                    <a:pt x="2148675" y="640240"/>
+                  </a:lnTo>
+                  <a:lnTo>
+                    <a:pt x="2077053" y="658902"/>
+                  </a:lnTo>
+                  <a:lnTo>
+                    <a:pt x="2005430" y="675598"/>
+                  </a:lnTo>
+                  <a:lnTo>
+                    <a:pt x="1933808" y="690535"/>
+                  </a:lnTo>
+                  <a:lnTo>
+                    <a:pt x="1862185" y="703897"/>
+                  </a:lnTo>
+                  <a:lnTo>
+                    <a:pt x="1790563" y="715852"/>
+                  </a:lnTo>
+                  <a:lnTo>
+                    <a:pt x="1718940" y="726547"/>
+                  </a:lnTo>
+                  <a:lnTo>
+                    <a:pt x="1647318" y="736115"/>
+                  </a:lnTo>
+                  <a:lnTo>
+                    <a:pt x="1575695" y="744675"/>
+                  </a:lnTo>
+                  <a:lnTo>
+                    <a:pt x="1504073" y="752334"/>
+                  </a:lnTo>
+                  <a:lnTo>
+                    <a:pt x="1432450" y="759185"/>
+                  </a:lnTo>
+                  <a:lnTo>
+                    <a:pt x="1360827" y="765314"/>
+                  </a:lnTo>
+                  <a:lnTo>
+                    <a:pt x="1289205" y="770798"/>
+                  </a:lnTo>
+                  <a:lnTo>
+                    <a:pt x="1217582" y="775703"/>
+                  </a:lnTo>
+                  <a:lnTo>
+                    <a:pt x="1145960" y="780092"/>
+                  </a:lnTo>
+                  <a:lnTo>
+                    <a:pt x="1074337" y="784018"/>
+                  </a:lnTo>
+                  <a:lnTo>
+                    <a:pt x="1002715" y="787531"/>
+                  </a:lnTo>
+                  <a:lnTo>
+                    <a:pt x="931092" y="790674"/>
+                  </a:lnTo>
+                  <a:lnTo>
+                    <a:pt x="859470" y="793485"/>
+                  </a:lnTo>
+                  <a:lnTo>
+                    <a:pt x="787847" y="796000"/>
+                  </a:lnTo>
+                  <a:lnTo>
+                    <a:pt x="716225" y="798250"/>
+                  </a:lnTo>
+                  <a:lnTo>
+                    <a:pt x="644602" y="800263"/>
+                  </a:lnTo>
+                  <a:lnTo>
+                    <a:pt x="572980" y="802064"/>
+                  </a:lnTo>
+                  <a:lnTo>
+                    <a:pt x="501357" y="803676"/>
+                  </a:lnTo>
+                  <a:lnTo>
+                    <a:pt x="429735" y="805117"/>
+                  </a:lnTo>
+                  <a:lnTo>
+                    <a:pt x="358112" y="806407"/>
+                  </a:lnTo>
+                  <a:lnTo>
+                    <a:pt x="286490" y="807560"/>
+                  </a:lnTo>
+                  <a:lnTo>
+                    <a:pt x="214867" y="808592"/>
+                  </a:lnTo>
+                  <a:lnTo>
+                    <a:pt x="143245" y="809516"/>
+                  </a:lnTo>
+                  <a:lnTo>
+                    <a:pt x="71622" y="810342"/>
+                  </a:lnTo>
+                  <a:lnTo>
+                    <a:pt x="0" y="811081"/>
                   </a:lnTo>
                 </a:path>
               </a:pathLst>
@@ -4244,309 +4244,309 @@
           </p:nvSpPr>
           <p:spPr>
             <a:xfrm>
-              <a:off x="1172049" y="4719491"/>
-              <a:ext cx="7090630" cy="14834"/>
+              <a:off x="1172049" y="4709668"/>
+              <a:ext cx="7090630" cy="32256"/>
             </a:xfrm>
             <a:custGeom>
               <a:avLst/>
               <a:pathLst>
-                <a:path w="7090630" h="14834">
+                <a:path w="7090630" h="32256">
                   <a:moveTo>
-                    <a:pt x="0" y="14834"/>
+                    <a:pt x="0" y="32256"/>
                   </a:moveTo>
                   <a:lnTo>
-                    <a:pt x="71622" y="14685"/>
-                  </a:lnTo>
-                  <a:lnTo>
-                    <a:pt x="143245" y="14537"/>
-                  </a:lnTo>
-                  <a:lnTo>
-                    <a:pt x="214867" y="14388"/>
-                  </a:lnTo>
-                  <a:lnTo>
-                    <a:pt x="286490" y="14240"/>
-                  </a:lnTo>
-                  <a:lnTo>
-                    <a:pt x="358112" y="14091"/>
-                  </a:lnTo>
-                  <a:lnTo>
-                    <a:pt x="429735" y="13942"/>
-                  </a:lnTo>
-                  <a:lnTo>
-                    <a:pt x="501357" y="13794"/>
-                  </a:lnTo>
-                  <a:lnTo>
-                    <a:pt x="572980" y="13645"/>
-                  </a:lnTo>
-                  <a:lnTo>
-                    <a:pt x="644602" y="13496"/>
-                  </a:lnTo>
-                  <a:lnTo>
-                    <a:pt x="716225" y="13347"/>
-                  </a:lnTo>
-                  <a:lnTo>
-                    <a:pt x="787847" y="13199"/>
-                  </a:lnTo>
-                  <a:lnTo>
-                    <a:pt x="859470" y="13050"/>
-                  </a:lnTo>
-                  <a:lnTo>
-                    <a:pt x="931092" y="12901"/>
-                  </a:lnTo>
-                  <a:lnTo>
-                    <a:pt x="1002715" y="12752"/>
-                  </a:lnTo>
-                  <a:lnTo>
-                    <a:pt x="1074337" y="12603"/>
-                  </a:lnTo>
-                  <a:lnTo>
-                    <a:pt x="1145960" y="12454"/>
-                  </a:lnTo>
-                  <a:lnTo>
-                    <a:pt x="1217582" y="12305"/>
-                  </a:lnTo>
-                  <a:lnTo>
-                    <a:pt x="1289205" y="12156"/>
-                  </a:lnTo>
-                  <a:lnTo>
-                    <a:pt x="1360827" y="12007"/>
-                  </a:lnTo>
-                  <a:lnTo>
-                    <a:pt x="1432450" y="11858"/>
-                  </a:lnTo>
-                  <a:lnTo>
-                    <a:pt x="1504073" y="11709"/>
-                  </a:lnTo>
-                  <a:lnTo>
-                    <a:pt x="1575695" y="11560"/>
-                  </a:lnTo>
-                  <a:lnTo>
-                    <a:pt x="1647318" y="11411"/>
-                  </a:lnTo>
-                  <a:lnTo>
-                    <a:pt x="1718940" y="11262"/>
-                  </a:lnTo>
-                  <a:lnTo>
-                    <a:pt x="1790563" y="11113"/>
-                  </a:lnTo>
-                  <a:lnTo>
-                    <a:pt x="1862185" y="10964"/>
-                  </a:lnTo>
-                  <a:lnTo>
-                    <a:pt x="1933808" y="10814"/>
-                  </a:lnTo>
-                  <a:lnTo>
-                    <a:pt x="2005430" y="10665"/>
-                  </a:lnTo>
-                  <a:lnTo>
-                    <a:pt x="2077053" y="10516"/>
-                  </a:lnTo>
-                  <a:lnTo>
-                    <a:pt x="2148675" y="10367"/>
-                  </a:lnTo>
-                  <a:lnTo>
-                    <a:pt x="2220298" y="10217"/>
-                  </a:lnTo>
-                  <a:lnTo>
-                    <a:pt x="2291920" y="10068"/>
-                  </a:lnTo>
-                  <a:lnTo>
-                    <a:pt x="2363543" y="9918"/>
-                  </a:lnTo>
-                  <a:lnTo>
-                    <a:pt x="2435165" y="9769"/>
-                  </a:lnTo>
-                  <a:lnTo>
-                    <a:pt x="2506788" y="9620"/>
-                  </a:lnTo>
-                  <a:lnTo>
-                    <a:pt x="2578410" y="9470"/>
-                  </a:lnTo>
-                  <a:lnTo>
-                    <a:pt x="2650033" y="9321"/>
-                  </a:lnTo>
-                  <a:lnTo>
-                    <a:pt x="2721655" y="9171"/>
-                  </a:lnTo>
-                  <a:lnTo>
-                    <a:pt x="2793278" y="9022"/>
-                  </a:lnTo>
-                  <a:lnTo>
-                    <a:pt x="2864901" y="8872"/>
-                  </a:lnTo>
-                  <a:lnTo>
-                    <a:pt x="2936523" y="8722"/>
-                  </a:lnTo>
-                  <a:lnTo>
-                    <a:pt x="3008146" y="8573"/>
-                  </a:lnTo>
-                  <a:lnTo>
-                    <a:pt x="3079768" y="8423"/>
-                  </a:lnTo>
-                  <a:lnTo>
-                    <a:pt x="3151391" y="8273"/>
-                  </a:lnTo>
-                  <a:lnTo>
-                    <a:pt x="3223013" y="8124"/>
-                  </a:lnTo>
-                  <a:lnTo>
-                    <a:pt x="3294636" y="7974"/>
-                  </a:lnTo>
-                  <a:lnTo>
-                    <a:pt x="3366258" y="7824"/>
-                  </a:lnTo>
-                  <a:lnTo>
-                    <a:pt x="3437881" y="7675"/>
-                  </a:lnTo>
-                  <a:lnTo>
-                    <a:pt x="3509503" y="7525"/>
-                  </a:lnTo>
-                  <a:lnTo>
-                    <a:pt x="3581126" y="7375"/>
-                  </a:lnTo>
-                  <a:lnTo>
-                    <a:pt x="3652748" y="7225"/>
-                  </a:lnTo>
-                  <a:lnTo>
-                    <a:pt x="3724371" y="7075"/>
-                  </a:lnTo>
-                  <a:lnTo>
-                    <a:pt x="3795993" y="6925"/>
-                  </a:lnTo>
-                  <a:lnTo>
-                    <a:pt x="3867616" y="6775"/>
-                  </a:lnTo>
-                  <a:lnTo>
-                    <a:pt x="3939238" y="6625"/>
-                  </a:lnTo>
-                  <a:lnTo>
-                    <a:pt x="4010861" y="6475"/>
-                  </a:lnTo>
-                  <a:lnTo>
-                    <a:pt x="4082483" y="6325"/>
-                  </a:lnTo>
-                  <a:lnTo>
-                    <a:pt x="4154106" y="6175"/>
-                  </a:lnTo>
-                  <a:lnTo>
-                    <a:pt x="4225729" y="6025"/>
-                  </a:lnTo>
-                  <a:lnTo>
-                    <a:pt x="4297351" y="5875"/>
-                  </a:lnTo>
-                  <a:lnTo>
-                    <a:pt x="4368974" y="5725"/>
-                  </a:lnTo>
-                  <a:lnTo>
-                    <a:pt x="4440596" y="5575"/>
-                  </a:lnTo>
-                  <a:lnTo>
-                    <a:pt x="4512219" y="5424"/>
-                  </a:lnTo>
-                  <a:lnTo>
-                    <a:pt x="4583841" y="5274"/>
-                  </a:lnTo>
-                  <a:lnTo>
-                    <a:pt x="4655464" y="5124"/>
-                  </a:lnTo>
-                  <a:lnTo>
-                    <a:pt x="4727086" y="4974"/>
-                  </a:lnTo>
-                  <a:lnTo>
-                    <a:pt x="4798709" y="4823"/>
-                  </a:lnTo>
-                  <a:lnTo>
-                    <a:pt x="4870331" y="4673"/>
-                  </a:lnTo>
-                  <a:lnTo>
-                    <a:pt x="4941954" y="4523"/>
-                  </a:lnTo>
-                  <a:lnTo>
-                    <a:pt x="5013576" y="4372"/>
-                  </a:lnTo>
-                  <a:lnTo>
-                    <a:pt x="5085199" y="4222"/>
-                  </a:lnTo>
-                  <a:lnTo>
-                    <a:pt x="5156821" y="4072"/>
-                  </a:lnTo>
-                  <a:lnTo>
-                    <a:pt x="5228444" y="3921"/>
-                  </a:lnTo>
-                  <a:lnTo>
-                    <a:pt x="5300066" y="3771"/>
-                  </a:lnTo>
-                  <a:lnTo>
-                    <a:pt x="5371689" y="3620"/>
-                  </a:lnTo>
-                  <a:lnTo>
-                    <a:pt x="5443311" y="3470"/>
-                  </a:lnTo>
-                  <a:lnTo>
-                    <a:pt x="5514934" y="3319"/>
-                  </a:lnTo>
-                  <a:lnTo>
-                    <a:pt x="5586557" y="3168"/>
-                  </a:lnTo>
-                  <a:lnTo>
-                    <a:pt x="5658179" y="3018"/>
-                  </a:lnTo>
-                  <a:lnTo>
-                    <a:pt x="5729802" y="2867"/>
-                  </a:lnTo>
-                  <a:lnTo>
-                    <a:pt x="5801424" y="2716"/>
-                  </a:lnTo>
-                  <a:lnTo>
-                    <a:pt x="5873047" y="2566"/>
-                  </a:lnTo>
-                  <a:lnTo>
-                    <a:pt x="5944669" y="2415"/>
-                  </a:lnTo>
-                  <a:lnTo>
-                    <a:pt x="6016292" y="2264"/>
-                  </a:lnTo>
-                  <a:lnTo>
-                    <a:pt x="6087914" y="2113"/>
-                  </a:lnTo>
-                  <a:lnTo>
-                    <a:pt x="6159537" y="1963"/>
-                  </a:lnTo>
-                  <a:lnTo>
-                    <a:pt x="6231159" y="1812"/>
-                  </a:lnTo>
-                  <a:lnTo>
-                    <a:pt x="6302782" y="1661"/>
-                  </a:lnTo>
-                  <a:lnTo>
-                    <a:pt x="6374404" y="1510"/>
-                  </a:lnTo>
-                  <a:lnTo>
-                    <a:pt x="6446027" y="1359"/>
-                  </a:lnTo>
-                  <a:lnTo>
-                    <a:pt x="6517649" y="1208"/>
-                  </a:lnTo>
-                  <a:lnTo>
-                    <a:pt x="6589272" y="1057"/>
-                  </a:lnTo>
-                  <a:lnTo>
-                    <a:pt x="6660894" y="906"/>
-                  </a:lnTo>
-                  <a:lnTo>
-                    <a:pt x="6732517" y="755"/>
-                  </a:lnTo>
-                  <a:lnTo>
-                    <a:pt x="6804139" y="604"/>
-                  </a:lnTo>
-                  <a:lnTo>
-                    <a:pt x="6875762" y="453"/>
-                  </a:lnTo>
-                  <a:lnTo>
-                    <a:pt x="6947385" y="302"/>
-                  </a:lnTo>
-                  <a:lnTo>
-                    <a:pt x="7019007" y="151"/>
+                    <a:pt x="71622" y="31937"/>
+                  </a:lnTo>
+                  <a:lnTo>
+                    <a:pt x="143245" y="31617"/>
+                  </a:lnTo>
+                  <a:lnTo>
+                    <a:pt x="214867" y="31297"/>
+                  </a:lnTo>
+                  <a:lnTo>
+                    <a:pt x="286490" y="30977"/>
+                  </a:lnTo>
+                  <a:lnTo>
+                    <a:pt x="358112" y="30657"/>
+                  </a:lnTo>
+                  <a:lnTo>
+                    <a:pt x="429735" y="30337"/>
+                  </a:lnTo>
+                  <a:lnTo>
+                    <a:pt x="501357" y="30016"/>
+                  </a:lnTo>
+                  <a:lnTo>
+                    <a:pt x="572980" y="29696"/>
+                  </a:lnTo>
+                  <a:lnTo>
+                    <a:pt x="644602" y="29375"/>
+                  </a:lnTo>
+                  <a:lnTo>
+                    <a:pt x="716225" y="29055"/>
+                  </a:lnTo>
+                  <a:lnTo>
+                    <a:pt x="787847" y="28734"/>
+                  </a:lnTo>
+                  <a:lnTo>
+                    <a:pt x="859470" y="28413"/>
+                  </a:lnTo>
+                  <a:lnTo>
+                    <a:pt x="931092" y="28092"/>
+                  </a:lnTo>
+                  <a:lnTo>
+                    <a:pt x="1002715" y="27770"/>
+                  </a:lnTo>
+                  <a:lnTo>
+                    <a:pt x="1074337" y="27449"/>
+                  </a:lnTo>
+                  <a:lnTo>
+                    <a:pt x="1145960" y="27128"/>
+                  </a:lnTo>
+                  <a:lnTo>
+                    <a:pt x="1217582" y="26806"/>
+                  </a:lnTo>
+                  <a:lnTo>
+                    <a:pt x="1289205" y="26484"/>
+                  </a:lnTo>
+                  <a:lnTo>
+                    <a:pt x="1360827" y="26162"/>
+                  </a:lnTo>
+                  <a:lnTo>
+                    <a:pt x="1432450" y="25840"/>
+                  </a:lnTo>
+                  <a:lnTo>
+                    <a:pt x="1504073" y="25518"/>
+                  </a:lnTo>
+                  <a:lnTo>
+                    <a:pt x="1575695" y="25196"/>
+                  </a:lnTo>
+                  <a:lnTo>
+                    <a:pt x="1647318" y="24874"/>
+                  </a:lnTo>
+                  <a:lnTo>
+                    <a:pt x="1718940" y="24551"/>
+                  </a:lnTo>
+                  <a:lnTo>
+                    <a:pt x="1790563" y="24228"/>
+                  </a:lnTo>
+                  <a:lnTo>
+                    <a:pt x="1862185" y="23906"/>
+                  </a:lnTo>
+                  <a:lnTo>
+                    <a:pt x="1933808" y="23583"/>
+                  </a:lnTo>
+                  <a:lnTo>
+                    <a:pt x="2005430" y="23260"/>
+                  </a:lnTo>
+                  <a:lnTo>
+                    <a:pt x="2077053" y="22937"/>
+                  </a:lnTo>
+                  <a:lnTo>
+                    <a:pt x="2148675" y="22613"/>
+                  </a:lnTo>
+                  <a:lnTo>
+                    <a:pt x="2220298" y="22290"/>
+                  </a:lnTo>
+                  <a:lnTo>
+                    <a:pt x="2291920" y="21966"/>
+                  </a:lnTo>
+                  <a:lnTo>
+                    <a:pt x="2363543" y="21643"/>
+                  </a:lnTo>
+                  <a:lnTo>
+                    <a:pt x="2435165" y="21319"/>
+                  </a:lnTo>
+                  <a:lnTo>
+                    <a:pt x="2506788" y="20995"/>
+                  </a:lnTo>
+                  <a:lnTo>
+                    <a:pt x="2578410" y="20671"/>
+                  </a:lnTo>
+                  <a:lnTo>
+                    <a:pt x="2650033" y="20347"/>
+                  </a:lnTo>
+                  <a:lnTo>
+                    <a:pt x="2721655" y="20023"/>
+                  </a:lnTo>
+                  <a:lnTo>
+                    <a:pt x="2793278" y="19698"/>
+                  </a:lnTo>
+                  <a:lnTo>
+                    <a:pt x="2864901" y="19374"/>
+                  </a:lnTo>
+                  <a:lnTo>
+                    <a:pt x="2936523" y="19049"/>
+                  </a:lnTo>
+                  <a:lnTo>
+                    <a:pt x="3008146" y="18724"/>
+                  </a:lnTo>
+                  <a:lnTo>
+                    <a:pt x="3079768" y="18399"/>
+                  </a:lnTo>
+                  <a:lnTo>
+                    <a:pt x="3151391" y="18074"/>
+                  </a:lnTo>
+                  <a:lnTo>
+                    <a:pt x="3223013" y="17749"/>
+                  </a:lnTo>
+                  <a:lnTo>
+                    <a:pt x="3294636" y="17424"/>
+                  </a:lnTo>
+                  <a:lnTo>
+                    <a:pt x="3366258" y="17098"/>
+                  </a:lnTo>
+                  <a:lnTo>
+                    <a:pt x="3437881" y="16773"/>
+                  </a:lnTo>
+                  <a:lnTo>
+                    <a:pt x="3509503" y="16447"/>
+                  </a:lnTo>
+                  <a:lnTo>
+                    <a:pt x="3581126" y="16121"/>
+                  </a:lnTo>
+                  <a:lnTo>
+                    <a:pt x="3652748" y="15796"/>
+                  </a:lnTo>
+                  <a:lnTo>
+                    <a:pt x="3724371" y="15469"/>
+                  </a:lnTo>
+                  <a:lnTo>
+                    <a:pt x="3795993" y="15143"/>
+                  </a:lnTo>
+                  <a:lnTo>
+                    <a:pt x="3867616" y="14817"/>
+                  </a:lnTo>
+                  <a:lnTo>
+                    <a:pt x="3939238" y="14490"/>
+                  </a:lnTo>
+                  <a:lnTo>
+                    <a:pt x="4010861" y="14164"/>
+                  </a:lnTo>
+                  <a:lnTo>
+                    <a:pt x="4082483" y="13837"/>
+                  </a:lnTo>
+                  <a:lnTo>
+                    <a:pt x="4154106" y="13510"/>
+                  </a:lnTo>
+                  <a:lnTo>
+                    <a:pt x="4225729" y="13183"/>
+                  </a:lnTo>
+                  <a:lnTo>
+                    <a:pt x="4297351" y="12856"/>
+                  </a:lnTo>
+                  <a:lnTo>
+                    <a:pt x="4368974" y="12529"/>
+                  </a:lnTo>
+                  <a:lnTo>
+                    <a:pt x="4440596" y="12202"/>
+                  </a:lnTo>
+                  <a:lnTo>
+                    <a:pt x="4512219" y="11874"/>
+                  </a:lnTo>
+                  <a:lnTo>
+                    <a:pt x="4583841" y="11547"/>
+                  </a:lnTo>
+                  <a:lnTo>
+                    <a:pt x="4655464" y="11219"/>
+                  </a:lnTo>
+                  <a:lnTo>
+                    <a:pt x="4727086" y="10891"/>
+                  </a:lnTo>
+                  <a:lnTo>
+                    <a:pt x="4798709" y="10563"/>
+                  </a:lnTo>
+                  <a:lnTo>
+                    <a:pt x="4870331" y="10235"/>
+                  </a:lnTo>
+                  <a:lnTo>
+                    <a:pt x="4941954" y="9907"/>
+                  </a:lnTo>
+                  <a:lnTo>
+                    <a:pt x="5013576" y="9578"/>
+                  </a:lnTo>
+                  <a:lnTo>
+                    <a:pt x="5085199" y="9250"/>
+                  </a:lnTo>
+                  <a:lnTo>
+                    <a:pt x="5156821" y="8921"/>
+                  </a:lnTo>
+                  <a:lnTo>
+                    <a:pt x="5228444" y="8593"/>
+                  </a:lnTo>
+                  <a:lnTo>
+                    <a:pt x="5300066" y="8264"/>
+                  </a:lnTo>
+                  <a:lnTo>
+                    <a:pt x="5371689" y="7935"/>
+                  </a:lnTo>
+                  <a:lnTo>
+                    <a:pt x="5443311" y="7606"/>
+                  </a:lnTo>
+                  <a:lnTo>
+                    <a:pt x="5514934" y="7276"/>
+                  </a:lnTo>
+                  <a:lnTo>
+                    <a:pt x="5586557" y="6947"/>
+                  </a:lnTo>
+                  <a:lnTo>
+                    <a:pt x="5658179" y="6617"/>
+                  </a:lnTo>
+                  <a:lnTo>
+                    <a:pt x="5729802" y="6288"/>
+                  </a:lnTo>
+                  <a:lnTo>
+                    <a:pt x="5801424" y="5958"/>
+                  </a:lnTo>
+                  <a:lnTo>
+                    <a:pt x="5873047" y="5628"/>
+                  </a:lnTo>
+                  <a:lnTo>
+                    <a:pt x="5944669" y="5298"/>
+                  </a:lnTo>
+                  <a:lnTo>
+                    <a:pt x="6016292" y="4968"/>
+                  </a:lnTo>
+                  <a:lnTo>
+                    <a:pt x="6087914" y="4637"/>
+                  </a:lnTo>
+                  <a:lnTo>
+                    <a:pt x="6159537" y="4307"/>
+                  </a:lnTo>
+                  <a:lnTo>
+                    <a:pt x="6231159" y="3976"/>
+                  </a:lnTo>
+                  <a:lnTo>
+                    <a:pt x="6302782" y="3646"/>
+                  </a:lnTo>
+                  <a:lnTo>
+                    <a:pt x="6374404" y="3315"/>
+                  </a:lnTo>
+                  <a:lnTo>
+                    <a:pt x="6446027" y="2984"/>
+                  </a:lnTo>
+                  <a:lnTo>
+                    <a:pt x="6517649" y="2653"/>
+                  </a:lnTo>
+                  <a:lnTo>
+                    <a:pt x="6589272" y="2322"/>
+                  </a:lnTo>
+                  <a:lnTo>
+                    <a:pt x="6660894" y="1990"/>
+                  </a:lnTo>
+                  <a:lnTo>
+                    <a:pt x="6732517" y="1659"/>
+                  </a:lnTo>
+                  <a:lnTo>
+                    <a:pt x="6804139" y="1327"/>
+                  </a:lnTo>
+                  <a:lnTo>
+                    <a:pt x="6875762" y="995"/>
+                  </a:lnTo>
+                  <a:lnTo>
+                    <a:pt x="6947385" y="664"/>
+                  </a:lnTo>
+                  <a:lnTo>
+                    <a:pt x="7019007" y="332"/>
                   </a:lnTo>
                   <a:lnTo>
                     <a:pt x="7090630" y="0"/>
@@ -4621,7 +4621,7 @@
           </p:nvSpPr>
           <p:spPr>
             <a:xfrm>
-              <a:off x="4313661" y="2073503"/>
+              <a:off x="4313914" y="2073503"/>
               <a:ext cx="0" cy="3649639"/>
             </a:xfrm>
             <a:custGeom>
@@ -4894,7 +4894,7 @@
           </p:nvSpPr>
           <p:spPr>
             <a:xfrm>
-              <a:off x="1343342" y="5785772"/>
+              <a:off x="1344940" y="5785772"/>
               <a:ext cx="161574" cy="80101"/>
             </a:xfrm>
             <a:prstGeom prst="rect">
@@ -4940,7 +4940,7 @@
           </p:nvSpPr>
           <p:spPr>
             <a:xfrm>
-              <a:off x="2280620" y="5785772"/>
+              <a:off x="2281218" y="5785772"/>
               <a:ext cx="161574" cy="80101"/>
             </a:xfrm>
             <a:prstGeom prst="rect">
@@ -4986,7 +4986,7 @@
           </p:nvSpPr>
           <p:spPr>
             <a:xfrm>
-              <a:off x="3217897" y="5785772"/>
+              <a:off x="3217496" y="5785772"/>
               <a:ext cx="161574" cy="80101"/>
             </a:xfrm>
             <a:prstGeom prst="rect">
@@ -5032,7 +5032,7 @@
           </p:nvSpPr>
           <p:spPr>
             <a:xfrm>
-              <a:off x="4204872" y="5785772"/>
+              <a:off x="4203472" y="5785772"/>
               <a:ext cx="62179" cy="80101"/>
             </a:xfrm>
             <a:prstGeom prst="rect">
@@ -5078,7 +5078,7 @@
           </p:nvSpPr>
           <p:spPr>
             <a:xfrm>
-              <a:off x="5111060" y="5785772"/>
+              <a:off x="5108660" y="5785772"/>
               <a:ext cx="124358" cy="80101"/>
             </a:xfrm>
             <a:prstGeom prst="rect">
@@ -5124,7 +5124,7 @@
           </p:nvSpPr>
           <p:spPr>
             <a:xfrm>
-              <a:off x="6048338" y="5785772"/>
+              <a:off x="6044938" y="5785772"/>
               <a:ext cx="124358" cy="80101"/>
             </a:xfrm>
             <a:prstGeom prst="rect">
@@ -5170,7 +5170,7 @@
           </p:nvSpPr>
           <p:spPr>
             <a:xfrm>
-              <a:off x="6985615" y="5785772"/>
+              <a:off x="6981216" y="5785772"/>
               <a:ext cx="124358" cy="80101"/>
             </a:xfrm>
             <a:prstGeom prst="rect">
@@ -5216,7 +5216,7 @@
           </p:nvSpPr>
           <p:spPr>
             <a:xfrm>
-              <a:off x="7922893" y="5785772"/>
+              <a:off x="7917494" y="5785772"/>
               <a:ext cx="124358" cy="80101"/>
             </a:xfrm>
             <a:prstGeom prst="rect">
@@ -5387,7 +5387,7 @@
                   <a:latin typeface="Helvetica"/>
                   <a:cs typeface="Helvetica"/>
                 </a:rPr>
-                <a:t>subHR per 10 % decline: 1.00 (0.23-4.24), p = 0.997  |  per IQR decline (Δ = 25.8 %): 0.99 (0.02-41.67)  |  IQR: [-10.7, 15.1] %</a:t>
+                <a:t>subHR per 10 % decline: 0.99 (0.23-4.24), p = 0.994  |  per IQR decline (Δ = 25.8 %): 0.99 (0.02-41.66)  |  IQR: [-10.6, 15.2] %</a:t>
               </a:r>
             </a:p>
           </p:txBody>
